--- a/Day/Day9/JavaScript_Functions.pptx
+++ b/Day/Day9/JavaScript_Functions.pptx
@@ -5848,8 +5848,14 @@
           <a:lstStyle/>
           <a:p>
             <a:r>
+              <a:rPr dirty="0"/>
               <a:t>12. Higher-order functions</a:t>
             </a:r>
+            <a:r>
+              <a:rPr lang="en-US" dirty="0"/>
+              <a:t>***</a:t>
+            </a:r>
+            <a:endParaRPr dirty="0"/>
           </a:p>
         </p:txBody>
       </p:sp>
@@ -6029,8 +6035,14 @@
           <a:lstStyle/>
           <a:p>
             <a:r>
+              <a:rPr dirty="0"/>
               <a:t>13. Callback functions</a:t>
             </a:r>
+            <a:r>
+              <a:rPr lang="en-US" dirty="0"/>
+              <a:t>***</a:t>
+            </a:r>
+            <a:endParaRPr dirty="0"/>
           </a:p>
         </p:txBody>
       </p:sp>
@@ -6177,8 +6189,14 @@
           <a:lstStyle/>
           <a:p>
             <a:r>
+              <a:rPr dirty="0"/>
               <a:t>14. Functions returning functions</a:t>
             </a:r>
+            <a:r>
+              <a:rPr lang="en-US" dirty="0"/>
+              <a:t>**</a:t>
+            </a:r>
+            <a:endParaRPr dirty="0"/>
           </a:p>
         </p:txBody>
       </p:sp>
@@ -6335,6 +6353,7 @@
           <a:lstStyle/>
           <a:p>
             <a:r>
+              <a:rPr dirty="0"/>
               <a:t>15. `this` in functions</a:t>
             </a:r>
           </a:p>
@@ -7684,8 +7703,13 @@
             </a:pPr>
             <a:r>
               <a:rPr dirty="0"/>
-              <a:t>A function stored as an object property is called a **method**.</a:t>
-            </a:r>
+              <a:t>A function stored as an object property is called a method</a:t>
+            </a:r>
+            <a:r>
+              <a:rPr lang="en-US" dirty="0"/>
+              <a:t>.</a:t>
+            </a:r>
+            <a:endParaRPr dirty="0"/>
           </a:p>
           <a:p>
             <a:pPr lvl="1">
